--- a/assets/powerpoints/module-n6-relations/C4-qui-que-ou-tout-dire-en-une-seule-phrase.pptx
+++ b/assets/powerpoints/module-n6-relations/C4-qui-que-ou-tout-dire-en-une-seule-phrase.pptx
@@ -4294,7 +4294,7 @@
                 </a:solidFill>
                 <a:latin typeface="Verdana"/>
               </a:rPr>
-              <a:t>SÉANCE C4  ·  MODULE 3</a:t>
+              <a:t>SÉANCE C4  ·  MODULE 4</a:t>
             </a:r>
           </a:p>
         </p:txBody>
